--- a/PhD_thesis.pptx
+++ b/PhD_thesis.pptx
@@ -726,10 +726,6 @@
           <a:bodyPr/>
           <a:lstStyle/>
           <a:p>
-            <a:r>
-              <a:rPr lang="en-US" altLang="zh-CN" dirty="0"/>
-              <a:t>Evolutionary computation is a promising method for solving regression problems.</a:t>
-            </a:r>
             <a:endParaRPr lang="zh-CN" altLang="en-US" dirty="0"/>
           </a:p>
         </p:txBody>
@@ -2302,10 +2298,6 @@
           <a:bodyPr/>
           <a:lstStyle/>
           <a:p>
-            <a:r>
-              <a:rPr lang="en-US" altLang="zh-CN" dirty="0"/>
-              <a:t>Evolutionary computation is a promising method for solving regression problems.</a:t>
-            </a:r>
             <a:endParaRPr lang="zh-CN" altLang="en-US" dirty="0"/>
           </a:p>
         </p:txBody>
@@ -2414,10 +2406,6 @@
           <a:bodyPr/>
           <a:lstStyle/>
           <a:p>
-            <a:r>
-              <a:rPr lang="en-US" altLang="zh-CN" dirty="0"/>
-              <a:t>Evolutionary computation is a promising method for solving regression problems.</a:t>
-            </a:r>
             <a:endParaRPr lang="zh-CN" altLang="en-US" dirty="0"/>
           </a:p>
         </p:txBody>
@@ -3042,10 +3030,6 @@
           <a:bodyPr/>
           <a:lstStyle/>
           <a:p>
-            <a:r>
-              <a:rPr lang="en-US" altLang="zh-CN" dirty="0"/>
-              <a:t>Evolutionary computation is a promising method for solving regression problems.</a:t>
-            </a:r>
             <a:endParaRPr lang="zh-CN" altLang="en-US" dirty="0"/>
           </a:p>
         </p:txBody>
@@ -3154,10 +3138,6 @@
           <a:bodyPr/>
           <a:lstStyle/>
           <a:p>
-            <a:r>
-              <a:rPr lang="en-US" altLang="zh-CN" dirty="0"/>
-              <a:t>Evolutionary computation is a promising method for solving regression problems.</a:t>
-            </a:r>
             <a:endParaRPr lang="zh-CN" altLang="en-US" dirty="0"/>
           </a:p>
         </p:txBody>
@@ -3768,10 +3748,6 @@
           <a:bodyPr/>
           <a:lstStyle/>
           <a:p>
-            <a:r>
-              <a:rPr lang="en-US" altLang="zh-CN" dirty="0"/>
-              <a:t>Evolutionary computation is a promising method for solving regression problems.</a:t>
-            </a:r>
             <a:endParaRPr lang="zh-CN" altLang="en-US" dirty="0"/>
           </a:p>
         </p:txBody>
@@ -3874,10 +3850,6 @@
           <a:bodyPr/>
           <a:lstStyle/>
           <a:p>
-            <a:r>
-              <a:rPr lang="en-US" altLang="zh-CN" dirty="0"/>
-              <a:t>Evolutionary computation is a promising method for solving regression problems.</a:t>
-            </a:r>
             <a:endParaRPr lang="zh-CN" altLang="en-US" dirty="0"/>
           </a:p>
         </p:txBody>
@@ -18881,7 +18853,7 @@
         <p:spPr>
           <a:xfrm>
             <a:off x="139519" y="5089699"/>
-            <a:ext cx="11141055" cy="523220"/>
+            <a:ext cx="11903827" cy="523220"/>
           </a:xfrm>
           <a:prstGeom prst="rect">
             <a:avLst/>
@@ -18919,8 +18891,8 @@
         </p:nvSpPr>
         <p:spPr>
           <a:xfrm>
-            <a:off x="4002111" y="5612919"/>
-            <a:ext cx="3287331" cy="460895"/>
+            <a:off x="4143780" y="5612919"/>
+            <a:ext cx="3512398" cy="460895"/>
           </a:xfrm>
           <a:prstGeom prst="rect">
             <a:avLst/>
@@ -19576,7 +19548,7 @@
         </p:nvSpPr>
         <p:spPr>
           <a:xfrm>
-            <a:off x="0" y="766209"/>
+            <a:off x="0" y="753330"/>
             <a:ext cx="7359498" cy="6181731"/>
           </a:xfrm>
         </p:spPr>
